--- a/en/slides/02-Computer_Architecture-First_Contact_with_RISC-V_Assembly-Lab.pptx
+++ b/en/slides/02-Computer_Architecture-First_Contact_with_RISC-V_Assembly-Lab.pptx
@@ -122,13 +122,13 @@
   <p:extLst>
     <p:ext uri="{521415D9-36F7-43E2-AB2F-B90AF26B5E84}">
       <p14:sectionLst xmlns:p14="http://schemas.microsoft.com/office/powerpoint/2010/main">
-        <p14:section name="Opening" id="{cdb4582f-d8b8-9bae-2988-ae906c58fb61}">
+        <p14:section name="Opening" id="{9c59a7a3-695f-ec65-7673-ff784d45e1b0}">
           <p14:sldIdLst>
             <p14:sldId id="256"/>
             <p14:sldId id="257"/>
           </p14:sldIdLst>
         </p14:section>
-        <p14:section name="Your first cartridge" id="{4bd5735b-925a-6c08-b2b4-950601150254}">
+        <p14:section name="Your first cartridge" id="{e91bc637-afbd-ec09-f72d-7713c4251c66}">
           <p14:sldIdLst>
             <p14:sldId id="258"/>
             <p14:sldId id="259"/>
@@ -137,14 +137,14 @@
             <p14:sldId id="262"/>
           </p14:sldIdLst>
         </p14:section>
-        <p14:section name="The complete program" id="{0681f12c-1b00-7e6a-f97f-48981f2cab88}">
+        <p14:section name="The complete program" id="{828efbf2-93ba-6148-4cb2-c23367e2fbf8}">
           <p14:sldIdLst>
             <p14:sldId id="263"/>
             <p14:sldId id="264"/>
             <p14:sldId id="265"/>
           </p14:sldIdLst>
         </p14:section>
-        <p14:section name="Run it and test it" id="{0d2db44f-3f56-5e42-13af-6781a2355993}">
+        <p14:section name="Run it and test it" id="{7829f921-dd95-9956-f468-773ad5e7f913}">
           <p14:sldIdLst>
             <p14:sldId id="266"/>
             <p14:sldId id="267"/>
@@ -153,7 +153,7 @@
             <p14:sldId id="270"/>
           </p14:sldIdLst>
         </p14:section>
-        <p14:section name="Exercises" id="{43dfddae-162d-3ff9-f251-365bd77b5a15}">
+        <p14:section name="Exercises" id="{a594f990-449c-3aa3-655f-54ae76af1198}">
           <p14:sldIdLst>
             <p14:sldId id="271"/>
           </p14:sldIdLst>
@@ -564,7 +564,7 @@
               <a:rPr lang="en-US" dirty="0"/>
               <a:t>This is the code deck of Lecture 02. Where the lecture deck develops the concepts, this deck contains everything that is written and executed: each listing with its commentary, the complete program of the lecture, the output it is expected to produce, and the procedure for testing it on each of the three hosts. The two decks are meant to be read together: the concepts explain the code, and the code gives the concepts an observable consequence.
 Learning status: UNDERSTAND NOW, by the end of this lecture you explain it, trace it and apply it on your own; USE NOW, you follow and use the recipe today; how it works inside is explained later, or is not part of the course; UNDERSTAND LATER, recognise the name and what it is for; a later lecture explains it. A slide without a badge is context: a story, an example, a question, an exercise.
-Learning status of this lecture. UNDERSTAND NOW: registers, compute, move, jump; registers; the init, update, draw contract; arguments in a0 to a7; why ra is saved; address, value, load, store; the base instructions; pseudo-instructions; an instruction is a number; tracing by hand. USE NOW: the calling convention (Lecture 18); bit masks (Lecture 08) and, used without being studied in this course, the assembler directives, the PRG32 tools, the PRG32 runtime calls, the PRG32-QT debugger, the complete program. UNDERSTAND LATER: the stack (Lecture 18); addressing modes (Lecture 19); instruction formats (Lecture 19); hexadecimal (Lecture 04); two's complement (Lecture 05); fixed point (Lecture 06); Boolean algebra (Lecture 08); the adder (Lecture 09); from volts to bits (Lecture 10); latches and flip-flops (Lecture 13); the processor cycle (Lecture 19); the Verm1 project (Lecture 07). A slide without a badge is context: a story, an example, a question, an exercise.</a:t>
+Learning status of this lecture. UNDERSTAND NOW: registers, compute, move, jump; registers; functions, call and return; the init, update, draw contract; reading a line of assembly; arguments in a0 to a7; why ra is saved; address, value, load, store; the base instructions; pseudo-instructions; an instruction is a number; tracing by hand. USE NOW: hexadecimal (Lecture 04); bit, byte, word (Lecture 04); the calling convention (Lecture 18); bit masks (Lecture 08) and, used without being studied in this course, the assembler directives, the PRG32 tools, the PRG32 runtime calls, the PRG32-QT debugger, the complete program. UNDERSTAND LATER: the stack (Lecture 18); addressing modes (Lecture 19); instruction formats (Lecture 19); two's complement (Lecture 05); fixed point (Lecture 06); Boolean algebra (Lecture 08); the adder (Lecture 09); from volts to bits (Lecture 10); latches and flip-flops (Lecture 13); the processor cycle (Lecture 19); the Verm1 project (Lecture 07). A slide without a badge is context: a story, an example, a question, an exercise.</a:t>
             </a:r>
             <a:endParaRPr lang="en-US" dirty="0"/>
           </a:p>
@@ -1639,7 +1639,7 @@
           <a:p>
             <a:r>
               <a:rPr lang="en-US" dirty="0"/>
-              <a:t>The third step preserves a value from one frame to the next. Registers do not retain their contents between successive invocations of update, so the value must reside in memory. counter is a label naming a location in the .data section that holds one word. The four instructions constitute the pattern underlying every variable: la places the address of the location in t0; lw loads the value into t1; addi modifies it; sw writes it back. Load, modify, store: the defining idiom of a load-store architecture. Nothing changes on the screen yet: the counter advances, but nothing draws it.
+              <a:t>The third step preserves a value from one frame to the next. Registers do not retain their contents between successive invocations of update, so the value must reside in memory. counter is a label naming a location in the .data section, the part of the program that holds data rather than instructions; the location holds one word. The four instructions constitute the pattern underlying every variable, a named place in memory whose value the program changes: la places the address of the location in t0; lw loads the value into t1; addi modifies it; sw writes it back. Load, modify, store: the defining idiom of a load-store architecture. Nothing changes on the screen yet: the counter advances, but nothing draws it.
 UNDERSTAND NOW: address, value, load, store.
 For the lecturer: Source: labs/05-asm-first-contact/step3_counter.S. Nothing visible changes yet: the counter ticks but nobody draws it. Ask the class how they could prove that it is ticking (answer: the debugger of PRG32-QT, or the next step).</a:t>
             </a:r>
@@ -1729,7 +1729,7 @@
           <a:p>
             <a:r>
               <a:rPr lang="en-US" dirty="0"/>
-              <a:t>The fourth step renders the counter visible as a green bar. The value is loaded, and andi a2, t1, 255 retains only its eight least significant bits, so the width runs from 0 to 255 and then begins again. The remaining registers carry the arguments of prg32_gfx_rect: x, y, width, height and colour. These eight lines contain the seeds of three later lectures: 255 written as 0xFF (positional notation, Lecture 04), andi used as a mask (Boolean algebra, Lecture 08), and 0x07e0 denoting green (the encoding of colour, Lecture 04). It is worth remembering where each was first encountered.
+              <a:t>The fourth step renders the counter visible as a green bar. The value is loaded, and andi a2, t1, 255 retains only its eight least significant bits, the eight on the right, which are worth the least, so the width runs from 0 to 255 and then begins again. The remaining registers carry the arguments of prg32_gfx_rect: x, y, width, height and colour. These eight lines contain the seeds of three later lectures: 255 written as 0xFF (positional notation, Lecture 04), andi used as a mask (Boolean algebra, Lecture 08), and 0x07e0 denoting green (the encoding of colour, Lecture 04). It is worth remembering where each was first encountered.
 USE NOW: bit masks (studied in Lecture 08).
 For the lecturer: Source: labs/05-asm-first-contact/step4_bar.S (the lines added to first_draw). Three future lectures hide in these eight lines: 255 = 0xFF (positional notation), andi as a bit mask (Boolean algebra), 0x07e0 as a colour (information encoding).</a:t>
             </a:r>
